--- a/content/W02/D4/slides/C2_W02_D04_half2_STUDENT.pptx
+++ b/content/W02/D4/slides/C2_W02_D04_half2_STUDENT.pptx
@@ -3492,14 +3492,14 @@
       </p:sp>
       <p:pic>
         <p:nvPicPr>
-          <p:cNvPr id="6" name="Picture 5" descr="2e91e837ed01fdd0.png"/>
+          <p:cNvPr id="6" name="Picture 5" descr="8f2dbebfc86103f1.png"/>
           <p:cNvPicPr>
             <a:picLocks noChangeAspect="1"/>
           </p:cNvPicPr>
           <p:nvPr/>
         </p:nvPicPr>
         <p:blipFill>
-          <a:blip r:embed="rId2"/>
+          <a:blip r:embed="rId3"/>
           <a:stretch>
             <a:fillRect/>
           </a:stretch>
@@ -3822,14 +3822,14 @@
       </p:sp>
       <p:pic>
         <p:nvPicPr>
-          <p:cNvPr id="6" name="Picture 5" descr="92adc9dc29ed23eb.png"/>
+          <p:cNvPr id="6" name="Picture 5" descr="e8ff1c0692210827.png"/>
           <p:cNvPicPr>
             <a:picLocks noChangeAspect="1"/>
           </p:cNvPicPr>
           <p:nvPr/>
         </p:nvPicPr>
         <p:blipFill>
-          <a:blip r:embed="rId2"/>
+          <a:blip r:embed="rId3"/>
           <a:stretch>
             <a:fillRect/>
           </a:stretch>
@@ -5500,14 +5500,14 @@
       </p:sp>
       <p:pic>
         <p:nvPicPr>
-          <p:cNvPr id="6" name="Picture 5" descr="4338e238e80794be.png"/>
+          <p:cNvPr id="6" name="Picture 5" descr="0ca2d24504d57a1f.png"/>
           <p:cNvPicPr>
             <a:picLocks noChangeAspect="1"/>
           </p:cNvPicPr>
           <p:nvPr/>
         </p:nvPicPr>
         <p:blipFill>
-          <a:blip r:embed="rId2"/>
+          <a:blip r:embed="rId3"/>
           <a:stretch>
             <a:fillRect/>
           </a:stretch>
@@ -6086,14 +6086,14 @@
       </p:sp>
       <p:pic>
         <p:nvPicPr>
-          <p:cNvPr id="6" name="Picture 5" descr="62dc46cf7440e099.png"/>
+          <p:cNvPr id="6" name="Picture 5" descr="f161a6570b5ee6c8.png"/>
           <p:cNvPicPr>
             <a:picLocks noChangeAspect="1"/>
           </p:cNvPicPr>
           <p:nvPr/>
         </p:nvPicPr>
         <p:blipFill>
-          <a:blip r:embed="rId2"/>
+          <a:blip r:embed="rId3"/>
           <a:stretch>
             <a:fillRect/>
           </a:stretch>
@@ -7884,14 +7884,14 @@
       </p:sp>
       <p:pic>
         <p:nvPicPr>
-          <p:cNvPr id="6" name="Picture 5" descr="944c0d4c18c89723.png"/>
+          <p:cNvPr id="6" name="Picture 5" descr="4016b5b7af1c7fca.png"/>
           <p:cNvPicPr>
             <a:picLocks noChangeAspect="1"/>
           </p:cNvPicPr>
           <p:nvPr/>
         </p:nvPicPr>
         <p:blipFill>
-          <a:blip r:embed="rId2"/>
+          <a:blip r:embed="rId3"/>
           <a:stretch>
             <a:fillRect/>
           </a:stretch>
@@ -9206,14 +9206,14 @@
       </p:sp>
       <p:pic>
         <p:nvPicPr>
-          <p:cNvPr id="6" name="Picture 5" descr="995f1dd3916579ca.png"/>
+          <p:cNvPr id="6" name="Picture 5" descr="d72fcdcea289e8db.png"/>
           <p:cNvPicPr>
             <a:picLocks noChangeAspect="1"/>
           </p:cNvPicPr>
           <p:nvPr/>
         </p:nvPicPr>
         <p:blipFill>
-          <a:blip r:embed="rId2"/>
+          <a:blip r:embed="rId3"/>
           <a:stretch>
             <a:fillRect/>
           </a:stretch>

--- a/content/W02/D4/slides/C2_W02_D04_half2_STUDENT.pptx
+++ b/content/W02/D4/slides/C2_W02_D04_half2_STUDENT.pptx
@@ -1132,12 +1132,12 @@
           <a:lstStyle/>
           <a:p>
             <a:r>
-              <a:t>LIVE, 3 minutes. Push on c: pandas is not wrong for Finance's analysis, it is wrong as the</a:t>
-            </a:r>
-          </a:p>
-          <a:p>
-            <a:r>
-              <a:t>place the official number is born.</a:t>
+              <a:t>LIVE, 3 minutes. Push on c: pandas serves Finance's analysis well; the official number is</a:t>
+            </a:r>
+          </a:p>
+          <a:p>
+            <a:r>
+              <a:t>born in the warehouse, where Finance reruns it.</a:t>
             </a:r>
           </a:p>
         </p:txBody>

--- a/content/W02/D4/slides/C2_W02_D04_half2_STUDENT.pptx
+++ b/content/W02/D4/slides/C2_W02_D04_half2_STUDENT.pptx
@@ -1466,7 +1466,7 @@
           </a:p>
           <a:p>
             <a:r>
-              <a:t>placeholder with the option chosen and run the step's checks. Post eleven letters and the four</a:t>
+              <a:t>placeholder with the option chosen and run the step's checks. Post thirteen letters and the four</a:t>
             </a:r>
           </a:p>
           <a:p>
@@ -2836,22 +2836,27 @@
           <a:lstStyle/>
           <a:p>
             <a:r>
-              <a:t>LIVE, 2 minutes. Source: The Register, 5 October 2020, checked 30 Sep 2026: results "automatically</a:t>
-            </a:r>
-          </a:p>
-          <a:p>
-            <a:r>
-              <a:t>fetched in CSV format" from commercial labs, stored in the older .XLS format "that limited the number</a:t>
-            </a:r>
-          </a:p>
-          <a:p>
-            <a:r>
-              <a:t>of rows to 65,536 per spreadsheet", and "15,841 cases between 25 September and 2 October were not</a:t>
-            </a:r>
-          </a:p>
-          <a:p>
-            <a:r>
-              <a:t>included". A row count on every run would have stopped it on day one.</a:t>
+              <a:t>LIVE, 2 minutes. Sources, checked 1 Oct 2026: Public Health England's statement of 4 October 2020,</a:t>
+            </a:r>
+          </a:p>
+          <a:p>
+            <a:r>
+              <a:t>"15,841 cases between 25 September and 2 October were not included in the reported daily COVID-19</a:t>
+            </a:r>
+          </a:p>
+          <a:p>
+            <a:r>
+              <a:t>cases"; and The Register, 5 October 2020, on the cause: results "automatically fetched in CSV format"</a:t>
+            </a:r>
+          </a:p>
+          <a:p>
+            <a:r>
+              <a:t>from commercial labs were stored in the older .XLS format "that limited the number of rows to 65,536</a:t>
+            </a:r>
+          </a:p>
+          <a:p>
+            <a:r>
+              <a:t>per spreadsheet". A row count on every run would have stopped it on day one.</a:t>
             </a:r>
           </a:p>
         </p:txBody>
@@ -6514,7 +6519,7 @@
                 </a:solidFill>
                 <a:latin typeface="Georgia"/>
               </a:rPr>
-              <a:t>01</a:t>
+              <a:t>06</a:t>
             </a:r>
           </a:p>
         </p:txBody>
@@ -6584,7 +6589,7 @@
                 </a:solidFill>
                 <a:latin typeface="Georgia"/>
               </a:rPr>
-              <a:t>02</a:t>
+              <a:t>07</a:t>
             </a:r>
           </a:p>
         </p:txBody>
@@ -6654,7 +6659,7 @@
                 </a:solidFill>
                 <a:latin typeface="Georgia"/>
               </a:rPr>
-              <a:t>03</a:t>
+              <a:t>08</a:t>
             </a:r>
           </a:p>
         </p:txBody>
@@ -6724,7 +6729,7 @@
                 </a:solidFill>
                 <a:latin typeface="Georgia"/>
               </a:rPr>
-              <a:t>04</a:t>
+              <a:t>09</a:t>
             </a:r>
           </a:p>
         </p:txBody>
@@ -6772,6 +6777,146 @@
         </p:nvSpPr>
         <p:spPr>
           <a:xfrm>
+            <a:off x="621792" y="6254496"/>
+            <a:ext cx="365760" cy="251205"/>
+          </a:xfrm>
+          <a:prstGeom prst="rect">
+            <a:avLst/>
+          </a:prstGeom>
+          <a:noFill/>
+        </p:spPr>
+        <p:txBody>
+          <a:bodyPr wrap="square" anchor="t" lIns="0" rIns="0" tIns="0" bIns="0">
+            <a:spAutoFit/>
+          </a:bodyPr>
+          <a:lstStyle/>
+          <a:p>
+            <a:pPr algn="l"/>
+            <a:r>
+              <a:rPr sz="1300" b="0" i="0">
+                <a:solidFill>
+                  <a:srgbClr val="D9A7FF"/>
+                </a:solidFill>
+                <a:latin typeface="Georgia"/>
+              </a:rPr>
+              <a:t>10</a:t>
+            </a:r>
+          </a:p>
+        </p:txBody>
+      </p:sp>
+      <p:sp>
+        <p:nvSpPr>
+          <p:cNvPr id="20" name="TextBox 19"/>
+          <p:cNvSpPr txBox="1"/>
+          <p:nvPr/>
+        </p:nvSpPr>
+        <p:spPr>
+          <a:xfrm>
+            <a:off x="1005839" y="6291072"/>
+            <a:ext cx="1779936" cy="185166"/>
+          </a:xfrm>
+          <a:prstGeom prst="rect">
+            <a:avLst/>
+          </a:prstGeom>
+          <a:noFill/>
+        </p:spPr>
+        <p:txBody>
+          <a:bodyPr wrap="square" anchor="t" lIns="0" rIns="0" tIns="0" bIns="0">
+            <a:spAutoFit/>
+          </a:bodyPr>
+          <a:lstStyle/>
+          <a:p>
+            <a:pPr algn="l"/>
+            <a:r>
+              <a:rPr sz="900" b="0" i="0">
+                <a:solidFill>
+                  <a:srgbClr val="FFFFFF"/>
+                </a:solidFill>
+                <a:latin typeface="Calibri"/>
+              </a:rPr>
+              <a:t>How would you say it aloud?</a:t>
+            </a:r>
+          </a:p>
+        </p:txBody>
+      </p:sp>
+      <p:sp>
+        <p:nvSpPr>
+          <p:cNvPr id="21" name="TextBox 20"/>
+          <p:cNvSpPr txBox="1"/>
+          <p:nvPr/>
+        </p:nvSpPr>
+        <p:spPr>
+          <a:xfrm>
+            <a:off x="2968656" y="6254496"/>
+            <a:ext cx="365760" cy="251205"/>
+          </a:xfrm>
+          <a:prstGeom prst="rect">
+            <a:avLst/>
+          </a:prstGeom>
+          <a:noFill/>
+        </p:spPr>
+        <p:txBody>
+          <a:bodyPr wrap="square" anchor="t" lIns="0" rIns="0" tIns="0" bIns="0">
+            <a:spAutoFit/>
+          </a:bodyPr>
+          <a:lstStyle/>
+          <a:p>
+            <a:pPr algn="l"/>
+            <a:r>
+              <a:rPr sz="1300" b="0" i="0">
+                <a:solidFill>
+                  <a:srgbClr val="D9A7FF"/>
+                </a:solidFill>
+                <a:latin typeface="Georgia"/>
+              </a:rPr>
+              <a:t>11</a:t>
+            </a:r>
+          </a:p>
+        </p:txBody>
+      </p:sp>
+      <p:sp>
+        <p:nvSpPr>
+          <p:cNvPr id="22" name="TextBox 21"/>
+          <p:cNvSpPr txBox="1"/>
+          <p:nvPr/>
+        </p:nvSpPr>
+        <p:spPr>
+          <a:xfrm>
+            <a:off x="3352704" y="6291072"/>
+            <a:ext cx="1898237" cy="185166"/>
+          </a:xfrm>
+          <a:prstGeom prst="rect">
+            <a:avLst/>
+          </a:prstGeom>
+          <a:noFill/>
+        </p:spPr>
+        <p:txBody>
+          <a:bodyPr wrap="square" anchor="t" lIns="0" rIns="0" tIns="0" bIns="0">
+            <a:spAutoFit/>
+          </a:bodyPr>
+          <a:lstStyle/>
+          <a:p>
+            <a:pPr algn="l"/>
+            <a:r>
+              <a:rPr sz="900" b="0" i="0">
+                <a:solidFill>
+                  <a:srgbClr val="FFFFFF"/>
+                </a:solidFill>
+                <a:latin typeface="Calibri"/>
+              </a:rPr>
+              <a:t>What goes to the growth team?</a:t>
+            </a:r>
+          </a:p>
+        </p:txBody>
+      </p:sp>
+      <p:sp>
+        <p:nvSpPr>
+          <p:cNvPr id="23" name="TextBox 22"/>
+          <p:cNvSpPr txBox="1"/>
+          <p:nvPr/>
+        </p:nvSpPr>
+        <p:spPr>
+          <a:xfrm>
             <a:off x="530352" y="6437376"/>
             <a:ext cx="9667951" cy="160401"/>
           </a:xfrm>
@@ -6801,7 +6946,7 @@
       </p:sp>
       <p:sp>
         <p:nvSpPr>
-          <p:cNvPr id="20" name="TextBox 19"/>
+          <p:cNvPr id="24" name="TextBox 23"/>
           <p:cNvSpPr txBox="1"/>
           <p:nvPr/>
         </p:nvSpPr>
@@ -8316,7 +8461,7 @@
       </p:sp>
       <p:pic>
         <p:nvPicPr>
-          <p:cNvPr id="9" name="mermaid diagram" descr="655f7d4da38a6360.png"/>
+          <p:cNvPr id="9" name="mermaid diagram" descr="6d43a9dc639d9050.png"/>
           <p:cNvPicPr>
             <a:picLocks noChangeAspect="1"/>
           </p:cNvPicPr>
@@ -8330,8 +8475,8 @@
         </p:blipFill>
         <p:spPr>
           <a:xfrm>
-            <a:off x="873766" y="1956816"/>
-            <a:ext cx="10444162" cy="1357312"/>
+            <a:off x="1681010" y="1956816"/>
+            <a:ext cx="8829675" cy="871537"/>
           </a:xfrm>
           <a:prstGeom prst="rect">
             <a:avLst/>
@@ -8346,7 +8491,7 @@
         </p:nvSpPr>
         <p:spPr>
           <a:xfrm>
-            <a:off x="530352" y="3460432"/>
+            <a:off x="530352" y="2974657"/>
             <a:ext cx="11130991" cy="807720"/>
           </a:xfrm>
           <a:prstGeom prst="roundRect">
@@ -8394,7 +8539,7 @@
         </p:nvSpPr>
         <p:spPr>
           <a:xfrm>
-            <a:off x="676656" y="3588448"/>
+            <a:off x="676656" y="3102673"/>
             <a:ext cx="45720" cy="551688"/>
           </a:xfrm>
           <a:prstGeom prst="roundRect">
@@ -8440,7 +8585,7 @@
         </p:nvSpPr>
         <p:spPr>
           <a:xfrm>
-            <a:off x="877824" y="3579304"/>
+            <a:off x="877824" y="3093529"/>
             <a:ext cx="10564063" cy="624840"/>
           </a:xfrm>
           <a:prstGeom prst="rect">
@@ -10686,7 +10831,7 @@
           <p:nvPr/>
         </p:nvGraphicFramePr>
         <p:xfrm>
-          <a:off x="530352" y="1682496"/>
+          <a:off x="530352" y="1956816"/>
           <a:ext cx="11130989" cy="1554480"/>
         </p:xfrm>
         <a:graphic>
@@ -11046,7 +11191,7 @@
       </p:graphicFrame>
       <p:pic>
         <p:nvPicPr>
-          <p:cNvPr id="10" name="mermaid diagram" descr="090d65a0b9b4aa2e.png"/>
+          <p:cNvPr id="10" name="mermaid diagram" descr="5031729d9ee3d5d4.png"/>
           <p:cNvPicPr>
             <a:picLocks noChangeAspect="1"/>
           </p:cNvPicPr>
@@ -11060,8 +11205,8 @@
         </p:blipFill>
         <p:spPr>
           <a:xfrm>
-            <a:off x="1388116" y="3493008"/>
-            <a:ext cx="9415462" cy="2543175"/>
+            <a:off x="2438247" y="3767328"/>
+            <a:ext cx="7315200" cy="2128837"/>
           </a:xfrm>
           <a:prstGeom prst="rect">
             <a:avLst/>
@@ -14149,7 +14294,7 @@
         </p:nvSpPr>
         <p:spPr>
           <a:xfrm>
-            <a:off x="530352" y="1916525"/>
+            <a:off x="530352" y="1956816"/>
             <a:ext cx="3527450" cy="571500"/>
           </a:xfrm>
           <a:prstGeom prst="rect">
@@ -14184,7 +14329,7 @@
         </p:nvSpPr>
         <p:spPr>
           <a:xfrm>
-            <a:off x="530352" y="2524601"/>
+            <a:off x="530352" y="2564892"/>
             <a:ext cx="3527450" cy="168656"/>
           </a:xfrm>
           <a:prstGeom prst="rect">
@@ -14219,7 +14364,7 @@
         </p:nvSpPr>
         <p:spPr>
           <a:xfrm>
-            <a:off x="530352" y="2725769"/>
+            <a:off x="530352" y="2766060"/>
             <a:ext cx="3527450" cy="193421"/>
           </a:xfrm>
           <a:prstGeom prst="rect">
@@ -14254,7 +14399,7 @@
         </p:nvSpPr>
         <p:spPr>
           <a:xfrm>
-            <a:off x="530352" y="3105245"/>
+            <a:off x="530352" y="3145536"/>
             <a:ext cx="3527450" cy="10972"/>
           </a:xfrm>
           <a:prstGeom prst="rect">
@@ -14298,7 +14443,7 @@
         </p:nvSpPr>
         <p:spPr>
           <a:xfrm>
-            <a:off x="4332122" y="1916525"/>
+            <a:off x="4332122" y="1956816"/>
             <a:ext cx="3527450" cy="571500"/>
           </a:xfrm>
           <a:prstGeom prst="rect">
@@ -14333,7 +14478,7 @@
         </p:nvSpPr>
         <p:spPr>
           <a:xfrm>
-            <a:off x="4332122" y="2524601"/>
+            <a:off x="4332122" y="2564892"/>
             <a:ext cx="3527450" cy="168656"/>
           </a:xfrm>
           <a:prstGeom prst="rect">
@@ -14368,7 +14513,7 @@
         </p:nvSpPr>
         <p:spPr>
           <a:xfrm>
-            <a:off x="4332122" y="2725769"/>
+            <a:off x="4332122" y="2766060"/>
             <a:ext cx="3527450" cy="193421"/>
           </a:xfrm>
           <a:prstGeom prst="rect">
@@ -14403,7 +14548,7 @@
         </p:nvSpPr>
         <p:spPr>
           <a:xfrm>
-            <a:off x="4332122" y="3105245"/>
+            <a:off x="4332122" y="3145536"/>
             <a:ext cx="3527450" cy="10972"/>
           </a:xfrm>
           <a:prstGeom prst="rect">
@@ -14447,7 +14592,7 @@
         </p:nvSpPr>
         <p:spPr>
           <a:xfrm>
-            <a:off x="8133892" y="1916525"/>
+            <a:off x="8133892" y="1956816"/>
             <a:ext cx="3527450" cy="571500"/>
           </a:xfrm>
           <a:prstGeom prst="rect">
@@ -14482,7 +14627,7 @@
         </p:nvSpPr>
         <p:spPr>
           <a:xfrm>
-            <a:off x="8133892" y="2524601"/>
+            <a:off x="8133892" y="2564892"/>
             <a:ext cx="3527450" cy="168656"/>
           </a:xfrm>
           <a:prstGeom prst="rect">
@@ -14517,7 +14662,7 @@
         </p:nvSpPr>
         <p:spPr>
           <a:xfrm>
-            <a:off x="8133892" y="2725769"/>
+            <a:off x="8133892" y="2766060"/>
             <a:ext cx="3527450" cy="193421"/>
           </a:xfrm>
           <a:prstGeom prst="rect">
@@ -14552,7 +14697,7 @@
         </p:nvSpPr>
         <p:spPr>
           <a:xfrm>
-            <a:off x="8133892" y="3105245"/>
+            <a:off x="8133892" y="3145536"/>
             <a:ext cx="3527450" cy="10972"/>
           </a:xfrm>
           <a:prstGeom prst="rect">
@@ -14590,7 +14735,7 @@
       </p:sp>
       <p:pic>
         <p:nvPicPr>
-          <p:cNvPr id="21" name="mermaid diagram" descr="25bed5d994c5ac9a.png"/>
+          <p:cNvPr id="21" name="mermaid diagram" descr="f85ce102064018d2.png"/>
           <p:cNvPicPr>
             <a:picLocks noChangeAspect="1"/>
           </p:cNvPicPr>
@@ -14604,8 +14749,8 @@
         </p:blipFill>
         <p:spPr>
           <a:xfrm>
-            <a:off x="1545278" y="3379565"/>
-            <a:ext cx="9101137" cy="2586037"/>
+            <a:off x="3095472" y="3419856"/>
+            <a:ext cx="6000750" cy="2428875"/>
           </a:xfrm>
           <a:prstGeom prst="rect">
             <a:avLst/>
@@ -19308,7 +19453,7 @@
                 </a:solidFill>
                 <a:latin typeface="Georgia"/>
               </a:rPr>
-              <a:t>Answering it alone: five parts, eleven letters</a:t>
+              <a:t>Answering it alone: five parts, thirteen letters</a:t>
             </a:r>
           </a:p>
         </p:txBody>
@@ -19793,7 +19938,7 @@
                 </a:solidFill>
                 <a:latin typeface="Calibri"/>
               </a:rPr>
-              <a:t>The first exposure, validated</a:t>
+              <a:t>The feed attached, and counted a second way</a:t>
             </a:r>
           </a:p>
         </p:txBody>
@@ -23705,7 +23850,7 @@
       </p:graphicFrame>
       <p:pic>
         <p:nvPicPr>
-          <p:cNvPr id="10" name="mermaid diagram" descr="dad285630a3a08d5.png"/>
+          <p:cNvPr id="10" name="mermaid diagram" descr="f3edace3a13c9b90.png"/>
           <p:cNvPicPr>
             <a:picLocks noChangeAspect="1"/>
           </p:cNvPicPr>
@@ -23719,8 +23864,8 @@
         </p:blipFill>
         <p:spPr>
           <a:xfrm>
-            <a:off x="2152497" y="4438904"/>
-            <a:ext cx="7886700" cy="1100137"/>
+            <a:off x="3459803" y="4438904"/>
+            <a:ext cx="5272087" cy="614362"/>
           </a:xfrm>
           <a:prstGeom prst="rect">
             <a:avLst/>
@@ -28352,7 +28497,7 @@
       </p:sp>
       <p:pic>
         <p:nvPicPr>
-          <p:cNvPr id="9" name="mermaid diagram" descr="326030d2456dc4f4.png"/>
+          <p:cNvPr id="9" name="mermaid diagram" descr="9ebcbe00d76423fa.png"/>
           <p:cNvPicPr>
             <a:picLocks noChangeAspect="1"/>
           </p:cNvPicPr>
@@ -28366,8 +28511,8 @@
         </p:blipFill>
         <p:spPr>
           <a:xfrm>
-            <a:off x="1931041" y="1856708"/>
-            <a:ext cx="8329612" cy="3214687"/>
+            <a:off x="2252510" y="1870996"/>
+            <a:ext cx="7686675" cy="3186112"/>
           </a:xfrm>
           <a:prstGeom prst="rect">
             <a:avLst/>
@@ -28382,7 +28527,7 @@
         </p:nvSpPr>
         <p:spPr>
           <a:xfrm>
-            <a:off x="530352" y="5217699"/>
+            <a:off x="530352" y="5203412"/>
             <a:ext cx="11130991" cy="807720"/>
           </a:xfrm>
           <a:prstGeom prst="roundRect">
@@ -28430,7 +28575,7 @@
         </p:nvSpPr>
         <p:spPr>
           <a:xfrm>
-            <a:off x="676656" y="5345715"/>
+            <a:off x="676656" y="5331428"/>
             <a:ext cx="45720" cy="551688"/>
           </a:xfrm>
           <a:prstGeom prst="roundRect">
@@ -28476,7 +28621,7 @@
         </p:nvSpPr>
         <p:spPr>
           <a:xfrm>
-            <a:off x="877824" y="5336571"/>
+            <a:off x="877824" y="5322284"/>
             <a:ext cx="10564063" cy="624840"/>
           </a:xfrm>
           <a:prstGeom prst="rect">
@@ -33730,7 +33875,7 @@
       </p:graphicFrame>
       <p:pic>
         <p:nvPicPr>
-          <p:cNvPr id="10" name="mermaid diagram" descr="fee0181a5660a3e7.png"/>
+          <p:cNvPr id="10" name="mermaid diagram" descr="840cc5e45dada99a.png"/>
           <p:cNvPicPr>
             <a:picLocks noChangeAspect="1"/>
           </p:cNvPicPr>
@@ -33744,8 +33889,8 @@
         </p:blipFill>
         <p:spPr>
           <a:xfrm>
-            <a:off x="2152497" y="4078224"/>
-            <a:ext cx="7886700" cy="1100137"/>
+            <a:off x="2588266" y="4078224"/>
+            <a:ext cx="7015162" cy="614362"/>
           </a:xfrm>
           <a:prstGeom prst="rect">
             <a:avLst/>
@@ -36330,7 +36475,7 @@
         </p:nvSpPr>
         <p:spPr>
           <a:xfrm>
-            <a:off x="530352" y="1682496"/>
+            <a:off x="530352" y="1956816"/>
             <a:ext cx="45720" cy="1595119"/>
           </a:xfrm>
           <a:prstGeom prst="roundRect">
@@ -36376,7 +36521,7 @@
         </p:nvSpPr>
         <p:spPr>
           <a:xfrm>
-            <a:off x="786384" y="1682496"/>
+            <a:off x="786384" y="1956816"/>
             <a:ext cx="10820095" cy="1595119"/>
           </a:xfrm>
           <a:prstGeom prst="rect">
@@ -36426,7 +36571,7 @@
         </p:nvSpPr>
         <p:spPr>
           <a:xfrm>
-            <a:off x="530352" y="3423920"/>
+            <a:off x="530352" y="3698240"/>
             <a:ext cx="11130991" cy="807720"/>
           </a:xfrm>
           <a:prstGeom prst="roundRect">
@@ -36474,7 +36619,7 @@
         </p:nvSpPr>
         <p:spPr>
           <a:xfrm>
-            <a:off x="676656" y="3551936"/>
+            <a:off x="676656" y="3826256"/>
             <a:ext cx="45720" cy="551688"/>
           </a:xfrm>
           <a:prstGeom prst="roundRect">
@@ -36520,7 +36665,7 @@
         </p:nvSpPr>
         <p:spPr>
           <a:xfrm>
-            <a:off x="877824" y="3542792"/>
+            <a:off x="877824" y="3817112"/>
             <a:ext cx="10564063" cy="624840"/>
           </a:xfrm>
           <a:prstGeom prst="rect">
@@ -36557,7 +36702,7 @@
       </p:sp>
       <p:pic>
         <p:nvPicPr>
-          <p:cNvPr id="14" name="mermaid diagram" descr="8221f91b2bcf46a1.png"/>
+          <p:cNvPr id="14" name="mermaid diagram" descr="6354e75ce94a0a55.png"/>
           <p:cNvPicPr>
             <a:picLocks noChangeAspect="1"/>
           </p:cNvPicPr>
@@ -36571,8 +36716,8 @@
         </p:blipFill>
         <p:spPr>
           <a:xfrm>
-            <a:off x="780897" y="4396232"/>
-            <a:ext cx="10629900" cy="1600200"/>
+            <a:off x="1509560" y="4670552"/>
+            <a:ext cx="9172575" cy="871537"/>
           </a:xfrm>
           <a:prstGeom prst="rect">
             <a:avLst/>
@@ -38469,7 +38614,7 @@
       </p:sp>
       <p:pic>
         <p:nvPicPr>
-          <p:cNvPr id="11" name="mermaid diagram" descr="3eed313e16a231e5.png"/>
+          <p:cNvPr id="11" name="mermaid diagram" descr="ca51796da90ba60c.png"/>
           <p:cNvPicPr>
             <a:picLocks noChangeAspect="1"/>
           </p:cNvPicPr>
@@ -38483,8 +38628,8 @@
         </p:blipFill>
         <p:spPr>
           <a:xfrm>
-            <a:off x="2029917" y="3423920"/>
-            <a:ext cx="8131859" cy="2775712"/>
+            <a:off x="2459790" y="3423920"/>
+            <a:ext cx="7272114" cy="2775712"/>
           </a:xfrm>
           <a:prstGeom prst="rect">
             <a:avLst/>
@@ -43279,7 +43424,7 @@
       </p:sp>
       <p:pic>
         <p:nvPicPr>
-          <p:cNvPr id="9" name="mermaid diagram" descr="a7577e1764cb9678.png"/>
+          <p:cNvPr id="9" name="mermaid diagram" descr="2bb733d12e513832.png"/>
           <p:cNvPicPr>
             <a:picLocks noChangeAspect="1"/>
           </p:cNvPicPr>
@@ -43293,8 +43438,8 @@
         </p:blipFill>
         <p:spPr>
           <a:xfrm>
-            <a:off x="2772559" y="1664208"/>
-            <a:ext cx="6646576" cy="3517391"/>
+            <a:off x="3045466" y="1956816"/>
+            <a:ext cx="6100762" cy="2400300"/>
           </a:xfrm>
           <a:prstGeom prst="rect">
             <a:avLst/>
@@ -43309,7 +43454,7 @@
         </p:nvSpPr>
         <p:spPr>
           <a:xfrm>
-            <a:off x="530352" y="5227320"/>
+            <a:off x="530352" y="4503420"/>
             <a:ext cx="11130991" cy="807720"/>
           </a:xfrm>
           <a:prstGeom prst="roundRect">
@@ -43357,7 +43502,7 @@
         </p:nvSpPr>
         <p:spPr>
           <a:xfrm>
-            <a:off x="676656" y="5355336"/>
+            <a:off x="676656" y="4631436"/>
             <a:ext cx="45720" cy="551688"/>
           </a:xfrm>
           <a:prstGeom prst="roundRect">
@@ -43403,7 +43548,7 @@
         </p:nvSpPr>
         <p:spPr>
           <a:xfrm>
-            <a:off x="877824" y="5346192"/>
+            <a:off x="877824" y="4622292"/>
             <a:ext cx="10564063" cy="624840"/>
           </a:xfrm>
           <a:prstGeom prst="rect">

--- a/content/W02/D4/slides/C2_W02_D04_half2_STUDENT.pptx
+++ b/content/W02/D4/slides/C2_W02_D04_half2_STUDENT.pptx
@@ -851,12 +851,12 @@
           <a:lstStyle/>
           <a:p>
             <a:r>
-              <a:t>LIVE, 3 minutes. Each guard is compared with a number the warehouse gives on its own, never a number</a:t>
-            </a:r>
-          </a:p>
-          <a:p>
-            <a:r>
-              <a:t>the notebook computed, which is what makes it a guard.</a:t>
+              <a:t>LIVE, 3 minutes. Each guard is compared with a number the warehouse gives on its own, so a slip in the</a:t>
+            </a:r>
+          </a:p>
+          <a:p>
+            <a:r>
+              <a:t>notebook cannot pass its own check.</a:t>
             </a:r>
           </a:p>
         </p:txBody>
@@ -926,7 +926,7 @@
           <a:lstStyle/>
           <a:p>
             <a:r>
-              <a:t>LIVE, 2 minutes. A guard is proved the only way a guard can be: by making it fire.</a:t>
+              <a:t>LIVE, 2 minutes. Prove each guard by making it fire on a copy broken on purpose.</a:t>
             </a:r>
           </a:p>
         </p:txBody>
@@ -6414,7 +6414,7 @@
                 </a:solidFill>
                 <a:latin typeface="Georgia"/>
               </a:rPr>
-              <a:t>Will the Monday table rebuild itself and hold?</a:t>
+              <a:t>Will Monday's table rebuild itself and hold?</a:t>
             </a:r>
           </a:p>
         </p:txBody>
@@ -6428,7 +6428,7 @@
         <p:spPr>
           <a:xfrm>
             <a:off x="621792" y="4263136"/>
-            <a:ext cx="10033711" cy="977645"/>
+            <a:ext cx="10033711" cy="663956"/>
           </a:xfrm>
           <a:prstGeom prst="rect">
             <a:avLst/>
@@ -6449,7 +6449,7 @@
                 </a:solidFill>
                 <a:latin typeface="Georgia"/>
               </a:rPr>
-              <a:t>“The warehouse queries are fine for Finance, but Marketing's analysts live in Python. Build them the table in pandas, from the warehouse, and make it refreshable in one run.”</a:t>
+              <a:t>“Build them the table in pandas, from the warehouse, and make it refreshable in one run.”</a:t>
             </a:r>
           </a:p>
         </p:txBody>
@@ -6462,7 +6462,7 @@
         </p:nvSpPr>
         <p:spPr>
           <a:xfrm>
-            <a:off x="621792" y="5295646"/>
+            <a:off x="621792" y="4981956"/>
             <a:ext cx="10033711" cy="218186"/>
           </a:xfrm>
           <a:prstGeom prst="rect">
@@ -6497,7 +6497,7 @@
         </p:nvSpPr>
         <p:spPr>
           <a:xfrm>
-            <a:off x="621792" y="5833872"/>
+            <a:off x="621792" y="5520182"/>
             <a:ext cx="365760" cy="251205"/>
           </a:xfrm>
           <a:prstGeom prst="rect">
@@ -6532,7 +6532,7 @@
         </p:nvSpPr>
         <p:spPr>
           <a:xfrm>
-            <a:off x="1005839" y="5870448"/>
+            <a:off x="1005839" y="5556758"/>
             <a:ext cx="1543335" cy="185166"/>
           </a:xfrm>
           <a:prstGeom prst="rect">
@@ -6567,7 +6567,7 @@
         </p:nvSpPr>
         <p:spPr>
           <a:xfrm>
-            <a:off x="2732055" y="5833872"/>
+            <a:off x="2732055" y="5520182"/>
             <a:ext cx="365760" cy="251205"/>
           </a:xfrm>
           <a:prstGeom prst="rect">
@@ -6602,7 +6602,7 @@
         </p:nvSpPr>
         <p:spPr>
           <a:xfrm>
-            <a:off x="3116103" y="5870448"/>
+            <a:off x="3116103" y="5556758"/>
             <a:ext cx="1543335" cy="185166"/>
           </a:xfrm>
           <a:prstGeom prst="rect">
@@ -6637,7 +6637,7 @@
         </p:nvSpPr>
         <p:spPr>
           <a:xfrm>
-            <a:off x="4842319" y="5833872"/>
+            <a:off x="4842319" y="5520182"/>
             <a:ext cx="365760" cy="251205"/>
           </a:xfrm>
           <a:prstGeom prst="rect">
@@ -6672,7 +6672,7 @@
         </p:nvSpPr>
         <p:spPr>
           <a:xfrm>
-            <a:off x="5226367" y="5870448"/>
+            <a:off x="5226367" y="5556758"/>
             <a:ext cx="1839087" cy="185166"/>
           </a:xfrm>
           <a:prstGeom prst="rect">
@@ -6707,7 +6707,7 @@
         </p:nvSpPr>
         <p:spPr>
           <a:xfrm>
-            <a:off x="7248334" y="5833872"/>
+            <a:off x="7248334" y="5520182"/>
             <a:ext cx="365760" cy="251205"/>
           </a:xfrm>
           <a:prstGeom prst="rect">
@@ -6742,7 +6742,7 @@
         </p:nvSpPr>
         <p:spPr>
           <a:xfrm>
-            <a:off x="7632382" y="5870448"/>
+            <a:off x="7632382" y="5556758"/>
             <a:ext cx="1720786" cy="185166"/>
           </a:xfrm>
           <a:prstGeom prst="rect">
@@ -6777,7 +6777,7 @@
         </p:nvSpPr>
         <p:spPr>
           <a:xfrm>
-            <a:off x="621792" y="6254496"/>
+            <a:off x="621792" y="5940806"/>
             <a:ext cx="365760" cy="251205"/>
           </a:xfrm>
           <a:prstGeom prst="rect">
@@ -6812,7 +6812,7 @@
         </p:nvSpPr>
         <p:spPr>
           <a:xfrm>
-            <a:off x="1005839" y="6291072"/>
+            <a:off x="1005839" y="5977382"/>
             <a:ext cx="1779936" cy="185166"/>
           </a:xfrm>
           <a:prstGeom prst="rect">
@@ -6847,7 +6847,7 @@
         </p:nvSpPr>
         <p:spPr>
           <a:xfrm>
-            <a:off x="2968656" y="6254496"/>
+            <a:off x="2968656" y="5940806"/>
             <a:ext cx="365760" cy="251205"/>
           </a:xfrm>
           <a:prstGeom prst="rect">
@@ -6882,7 +6882,7 @@
         </p:nvSpPr>
         <p:spPr>
           <a:xfrm>
-            <a:off x="3352704" y="6291072"/>
+            <a:off x="3352704" y="5977382"/>
             <a:ext cx="1898237" cy="185166"/>
           </a:xfrm>
           <a:prstGeom prst="rect">
@@ -6939,7 +6939,7 @@
                 </a:solidFill>
                 <a:latin typeface="Calibri"/>
               </a:rPr>
-              <a:t>Week 2, Day 4. Will the Monday table rebuild itself and hold?</a:t>
+              <a:t>Week 2, Day 4. Will Monday's table rebuild itself and hold?</a:t>
             </a:r>
           </a:p>
         </p:txBody>
@@ -13531,7 +13531,7 @@
                 </a:solidFill>
                 <a:latin typeface="Calibri"/>
               </a:rPr>
-              <a:t>Nothing, which is the point: every broken copy trips a guard, and the honest one trips none.</a:t>
+              <a:t>Nothing ships broken: every broken copy trips a guard, and the honest table trips none.</a:t>
             </a:r>
           </a:p>
         </p:txBody>
@@ -18536,7 +18536,7 @@
                 </a:solidFill>
                 <a:latin typeface="Calibri"/>
               </a:rPr>
-              <a:t>Week 2, Day 4. Will the Monday table rebuild itself and hold?</a:t>
+              <a:t>Week 2, Day 4. Will Monday's table rebuild itself and hold?</a:t>
             </a:r>
           </a:p>
         </p:txBody>
@@ -19212,7 +19212,7 @@
                 </a:solidFill>
                 <a:latin typeface="Calibri"/>
               </a:rPr>
-              <a:t>Week 2, Day 4. Will the Monday table rebuild itself and hold?</a:t>
+              <a:t>Week 2, Day 4. Will Monday's table rebuild itself and hold?</a:t>
             </a:r>
           </a:p>
         </p:txBody>
@@ -23064,7 +23064,7 @@
                 </a:solidFill>
                 <a:latin typeface="Calibri"/>
               </a:rPr>
-              <a:t>Week 2, Day 4. Will the Monday table rebuild itself and hold?</a:t>
+              <a:t>Week 2, Day 4. Will Monday's table rebuild itself and hold?</a:t>
             </a:r>
           </a:p>
         </p:txBody>
@@ -26405,7 +26405,7 @@
                 </a:solidFill>
                 <a:latin typeface="Calibri"/>
               </a:rPr>
-              <a:t>Week 2, Day 4. Will the Monday table rebuild itself and hold?</a:t>
+              <a:t>Week 2, Day 4. Will Monday's table rebuild itself and hold?</a:t>
             </a:r>
           </a:p>
         </p:txBody>
@@ -31135,7 +31135,7 @@
                 </a:solidFill>
                 <a:latin typeface="Calibri"/>
               </a:rPr>
-              <a:t>Week 2, Day 4. Will the Monday table rebuild itself and hold?</a:t>
+              <a:t>Week 2, Day 4. Will Monday's table rebuild itself and hold?</a:t>
             </a:r>
           </a:p>
         </p:txBody>
@@ -36186,7 +36186,7 @@
                 </a:solidFill>
                 <a:latin typeface="Calibri"/>
               </a:rPr>
-              <a:t>Week 2, Day 4. Will the Monday table rebuild itself and hold?</a:t>
+              <a:t>Week 2, Day 4. Will Monday's table rebuild itself and hold?</a:t>
             </a:r>
           </a:p>
         </p:txBody>
@@ -41413,7 +41413,7 @@
                 </a:solidFill>
                 <a:latin typeface="Calibri"/>
               </a:rPr>
-              <a:t>A refresh that never counts rows in against rows out loses them without a sound, and a week of decisions rests on the short number.</a:t>
+              <a:t>A refresh that never counts rows in against rows out loses them without an error, and a week of decisions rests on the short number.</a:t>
             </a:r>
           </a:p>
         </p:txBody>
